--- a/slides/block3c.pptx
+++ b/slides/block3c.pptx
@@ -1083,7 +1083,7 @@
           <a:lstStyle/>
           <a:p>
             <a:r>
-              <a:t>The best slide in the block. Three things fall out of it: uncertainty is not decoration, the choice of effectiveness source is itself a decision, and a price negotiation can do more for value than any amount of further modelling. Give it two minutes.</a:t>
+              <a:t>The best slide in the day. They saw the first two columns in Session 5 and concluded that the choice of trial moved the ICER by a third. Now show what it did to the probability: 4% against 57.3%, which is the difference between "no" and "maybe". Three things fall out of it: uncertainty is not decoration, the choice of effectiveness source is itself a decision, and a price negotiation can do more for value than any amount of further modelling. Give it two minutes.</a:t>
             </a:r>
           </a:p>
         </p:txBody>
@@ -8834,7 +8834,7 @@
         <p:spPr>
           <a:xfrm>
             <a:off x="552450" y="1142050"/>
-            <a:ext cx="11087100" cy="781645"/>
+            <a:ext cx="11087100" cy="390823"/>
           </a:xfrm>
           <a:prstGeom prst="rect">
             <a:avLst/>
@@ -8863,7 +8863,7 @@
                 </a:solidFill>
                 <a:latin typeface="Arial"/>
               </a:rPr>
-              <a:t>One year of adjuvant trastuzumab versus chemotherapy alone, non-metastatic breast cancer, Markov model, societal perspective:</a:t>
+              <a:t>The trastuzumab table from Session 5, with the column that was missing then:</a:t>
             </a:r>
           </a:p>
         </p:txBody>
@@ -8877,7 +8877,7 @@
           <p:nvPr/>
         </p:nvGraphicFramePr>
         <p:xfrm>
-          <a:off x="552450" y="2083296"/>
+          <a:off x="552450" y="1692473"/>
           <a:ext cx="11087100" cy="2150715"/>
         </p:xfrm>
         <a:graphic>
@@ -9099,6 +9099,9 @@
                           <a:solidFill>
                             <a:srgbClr val="FFFFFF"/>
                           </a:solidFill>
+                          <a:highlight>
+                            <a:srgbClr val="A32217"/>
+                          </a:highlight>
                           <a:latin typeface="Arial"/>
                         </a:rPr>
                         <a:t>4%</a:t>
@@ -9203,6 +9206,9 @@
                           <a:solidFill>
                             <a:srgbClr val="FFFFFF"/>
                           </a:solidFill>
+                          <a:highlight>
+                            <a:srgbClr val="8A5A00"/>
+                          </a:highlight>
                           <a:latin typeface="Arial"/>
                         </a:rPr>
                         <a:t>57.3%</a:t>
@@ -9311,6 +9317,9 @@
                           <a:solidFill>
                             <a:srgbClr val="FFFFFF"/>
                           </a:solidFill>
+                          <a:highlight>
+                            <a:srgbClr val="17683C"/>
+                          </a:highlight>
                           <a:latin typeface="Arial"/>
                         </a:rPr>
                         <a:t>90%</a:t>
@@ -9336,7 +9345,7 @@
         </p:nvSpPr>
         <p:spPr>
           <a:xfrm>
-            <a:off x="552450" y="4356050"/>
+            <a:off x="552450" y="3965228"/>
             <a:ext cx="11087100" cy="536674"/>
           </a:xfrm>
           <a:prstGeom prst="rect">
@@ -9378,7 +9387,7 @@
         </p:nvSpPr>
         <p:spPr>
           <a:xfrm>
-            <a:off x="552450" y="4356050"/>
+            <a:off x="552450" y="3965228"/>
             <a:ext cx="57150" cy="536674"/>
           </a:xfrm>
           <a:prstGeom prst="rect">
@@ -9422,7 +9431,7 @@
         </p:nvSpPr>
         <p:spPr>
           <a:xfrm>
-            <a:off x="776189" y="4356390"/>
+            <a:off x="776189" y="3965568"/>
             <a:ext cx="10863361" cy="516334"/>
           </a:xfrm>
           <a:prstGeom prst="rect">
@@ -9465,7 +9474,7 @@
         </p:nvSpPr>
         <p:spPr>
           <a:xfrm>
-            <a:off x="552450" y="5055783"/>
+            <a:off x="552450" y="4664961"/>
             <a:ext cx="11087100" cy="781645"/>
           </a:xfrm>
           <a:prstGeom prst="rect">
@@ -9508,7 +9517,7 @@
         </p:nvSpPr>
         <p:spPr>
           <a:xfrm>
-            <a:off x="552450" y="5997029"/>
+            <a:off x="552450" y="5606207"/>
             <a:ext cx="11087100" cy="9525"/>
           </a:xfrm>
           <a:prstGeom prst="rect">
@@ -9552,7 +9561,7 @@
         </p:nvSpPr>
         <p:spPr>
           <a:xfrm>
-            <a:off x="552450" y="6065850"/>
+            <a:off x="552450" y="5675027"/>
             <a:ext cx="11087100" cy="258098"/>
           </a:xfrm>
           <a:prstGeom prst="rect">
@@ -11001,7 +11010,7 @@
                 </a:solidFill>
                 <a:latin typeface="Arial"/>
               </a:rPr>
-              <a:t>By the end of this block</a:t>
+              <a:t>By the end of this session</a:t>
             </a:r>
           </a:p>
         </p:txBody>

--- a/slides/block3c.pptx
+++ b/slides/block3c.pptx
@@ -7691,7 +7691,7 @@
         <p:spPr>
           <a:xfrm>
             <a:off x="552450" y="1162050"/>
-            <a:ext cx="11106150" cy="4114800"/>
+            <a:ext cx="11106150" cy="3733800"/>
           </a:xfrm>
           <a:prstGeom prst="rect">
             <a:avLst/>
@@ -7706,7 +7706,7 @@
         </p:nvSpPr>
         <p:spPr>
           <a:xfrm>
-            <a:off x="552450" y="5316828"/>
+            <a:off x="552450" y="4935828"/>
             <a:ext cx="11087100" cy="781645"/>
           </a:xfrm>
           <a:prstGeom prst="rect">
@@ -7767,7 +7767,7 @@
         </p:nvSpPr>
         <p:spPr>
           <a:xfrm>
-            <a:off x="552450" y="6258074"/>
+            <a:off x="552450" y="5950595"/>
             <a:ext cx="11087100" cy="9525"/>
           </a:xfrm>
           <a:prstGeom prst="rect">
@@ -7811,8 +7811,8 @@
         </p:nvSpPr>
         <p:spPr>
           <a:xfrm>
-            <a:off x="552450" y="6326894"/>
-            <a:ext cx="11087100" cy="258098"/>
+            <a:off x="552450" y="6196551"/>
+            <a:ext cx="10420350" cy="248692"/>
           </a:xfrm>
           <a:prstGeom prst="rect">
             <a:avLst/>
@@ -7855,6 +7855,30 @@
           </a:p>
         </p:txBody>
       </p:sp>
+      <p:pic>
+        <p:nvPicPr>
+          <p:cNvPr id="8" name="Picture 7" descr="block3c-14-1.png"/>
+          <p:cNvPicPr>
+            <a:picLocks noChangeAspect="1"/>
+          </p:cNvPicPr>
+          <p:nvPr/>
+        </p:nvPicPr>
+        <p:blipFill>
+          <a:blip r:embed="rId3"/>
+          <a:stretch>
+            <a:fillRect/>
+          </a:stretch>
+        </p:blipFill>
+        <p:spPr>
+          <a:xfrm>
+            <a:off x="11144250" y="6137672"/>
+            <a:ext cx="495300" cy="495300"/>
+          </a:xfrm>
+          <a:prstGeom prst="rect">
+            <a:avLst/>
+          </a:prstGeom>
+        </p:spPr>
+      </p:pic>
     </p:spTree>
   </p:cSld>
   <p:clrMapOvr>
@@ -17311,7 +17335,7 @@
         <p:spPr>
           <a:xfrm>
             <a:off x="552450" y="1162050"/>
-            <a:ext cx="11106150" cy="4114800"/>
+            <a:ext cx="11106150" cy="3733800"/>
           </a:xfrm>
           <a:prstGeom prst="rect">
             <a:avLst/>
@@ -17326,7 +17350,7 @@
         </p:nvSpPr>
         <p:spPr>
           <a:xfrm>
-            <a:off x="552450" y="5316828"/>
+            <a:off x="552450" y="4935828"/>
             <a:ext cx="11087100" cy="781645"/>
           </a:xfrm>
           <a:prstGeom prst="rect">
@@ -17387,7 +17411,7 @@
         </p:nvSpPr>
         <p:spPr>
           <a:xfrm>
-            <a:off x="552450" y="6258074"/>
+            <a:off x="552450" y="5950595"/>
             <a:ext cx="11087100" cy="9525"/>
           </a:xfrm>
           <a:prstGeom prst="rect">
@@ -17431,8 +17455,8 @@
         </p:nvSpPr>
         <p:spPr>
           <a:xfrm>
-            <a:off x="552450" y="6326894"/>
-            <a:ext cx="11087100" cy="258098"/>
+            <a:off x="552450" y="6196551"/>
+            <a:ext cx="10420350" cy="248692"/>
           </a:xfrm>
           <a:prstGeom prst="rect">
             <a:avLst/>
@@ -17475,6 +17499,30 @@
           </a:p>
         </p:txBody>
       </p:sp>
+      <p:pic>
+        <p:nvPicPr>
+          <p:cNvPr id="8" name="Picture 7" descr="block3c-9-1.png"/>
+          <p:cNvPicPr>
+            <a:picLocks noChangeAspect="1"/>
+          </p:cNvPicPr>
+          <p:nvPr/>
+        </p:nvPicPr>
+        <p:blipFill>
+          <a:blip r:embed="rId3"/>
+          <a:stretch>
+            <a:fillRect/>
+          </a:stretch>
+        </p:blipFill>
+        <p:spPr>
+          <a:xfrm>
+            <a:off x="11144250" y="6137672"/>
+            <a:ext cx="495300" cy="495300"/>
+          </a:xfrm>
+          <a:prstGeom prst="rect">
+            <a:avLst/>
+          </a:prstGeom>
+        </p:spPr>
+      </p:pic>
     </p:spTree>
   </p:cSld>
   <p:clrMapOvr>
